--- a/curso/pptx/S45.pptx
+++ b/curso/pptx/S45.pptx
@@ -3890,8 +3890,8 @@
         </p:nvSpPr>
         <p:spPr>
           <a:xfrm>
-            <a:off x="640000" y="420000"/>
-            <a:ext cx="10912000" cy="420000"/>
+            <a:off x="10652000" y="380000"/>
+            <a:ext cx="900000" cy="800000"/>
           </a:xfrm>
           <a:prstGeom prst="rect">
             <a:avLst/>
@@ -3906,17 +3906,17 @@
           <a:p>
             <a:pPr>
               <a:spcAft>
-                <a:spcPts val="810"/>
+                <a:spcPts val="1980"/>
               </a:spcAft>
             </a:pPr>
             <a:r>
-              <a:rPr sz="1800" b="1">
+              <a:rPr sz="4400" b="0">
                 <a:solidFill>
                   <a:srgbClr val="1F2A44"/>
                 </a:solidFill>
                 <a:latin typeface="Nunito Sans"/>
               </a:rPr>
-              <a:t>🦉 Aula de Filosofía</a:t>
+              <a:t>🙃</a:t>
             </a:r>
           </a:p>
         </p:txBody>

--- a/curso/pptx/S45.pptx
+++ b/curso/pptx/S45.pptx
@@ -471,426 +471,6 @@
     </a:lvl9pPr>
   </p:notesStyle>
 </p:notesMaster>
-</file>
-
-<file path=ppt/notesSlides/notesSlide1.xml><?xml version="1.0" encoding="utf-8"?>
-<p:notes xmlns:a="http://schemas.openxmlformats.org/drawingml/2006/main" xmlns:p="http://schemas.openxmlformats.org/presentationml/2006/main" xmlns:r="http://schemas.openxmlformats.org/officeDocument/2006/relationships">
-  <p:cSld>
-    <p:spTree>
-      <p:nvGrpSpPr>
-        <p:cNvPr id="1" name=""/>
-        <p:cNvGrpSpPr/>
-        <p:nvPr/>
-      </p:nvGrpSpPr>
-      <p:grpSpPr>
-        <a:xfrm>
-          <a:off x="0" y="0"/>
-          <a:ext cx="0" cy="0"/>
-          <a:chOff x="0" y="0"/>
-          <a:chExt cx="0" cy="0"/>
-        </a:xfrm>
-      </p:grpSpPr>
-      <p:sp>
-        <p:nvSpPr>
-          <p:cNvPr id="2" name="Slide Image Placeholder 1"/>
-          <p:cNvSpPr>
-            <a:spLocks noGrp="1"/>
-          </p:cNvSpPr>
-          <p:nvPr>
-            <p:ph type="sldImg" idx="2"/>
-          </p:nvPr>
-        </p:nvSpPr>
-        <p:spPr/>
-      </p:sp>
-      <p:sp>
-        <p:nvSpPr>
-          <p:cNvPr id="3" name="Notes Placeholder 2"/>
-          <p:cNvSpPr>
-            <a:spLocks noGrp="1"/>
-          </p:cNvSpPr>
-          <p:nvPr>
-            <p:ph type="body" idx="3" sz="quarter"/>
-          </p:nvPr>
-        </p:nvSpPr>
-        <p:spPr/>
-        <p:txBody>
-          <a:bodyPr/>
-          <a:lstStyle/>
-          <a:p>
-            <a:r>
-              <a:t>3 minutos. Sin apuntes. Es para recordar, no cuenta para nota.</a:t>
-            </a:r>
-          </a:p>
-        </p:txBody>
-      </p:sp>
-      <p:sp>
-        <p:nvSpPr>
-          <p:cNvPr id="4" name="Slide Number Placeholder 3"/>
-          <p:cNvSpPr>
-            <a:spLocks noGrp="1"/>
-          </p:cNvSpPr>
-          <p:nvPr>
-            <p:ph type="sldNum" idx="5" sz="quarter"/>
-          </p:nvPr>
-        </p:nvSpPr>
-        <p:spPr/>
-      </p:sp>
-    </p:spTree>
-  </p:cSld>
-  <p:clrMapOvr>
-    <a:masterClrMapping/>
-  </p:clrMapOvr>
-</p:notes>
-</file>
-
-<file path=ppt/notesSlides/notesSlide2.xml><?xml version="1.0" encoding="utf-8"?>
-<p:notes xmlns:a="http://schemas.openxmlformats.org/drawingml/2006/main" xmlns:p="http://schemas.openxmlformats.org/presentationml/2006/main" xmlns:r="http://schemas.openxmlformats.org/officeDocument/2006/relationships">
-  <p:cSld>
-    <p:spTree>
-      <p:nvGrpSpPr>
-        <p:cNvPr id="1" name=""/>
-        <p:cNvGrpSpPr/>
-        <p:nvPr/>
-      </p:nvGrpSpPr>
-      <p:grpSpPr>
-        <a:xfrm>
-          <a:off x="0" y="0"/>
-          <a:ext cx="0" cy="0"/>
-          <a:chOff x="0" y="0"/>
-          <a:chExt cx="0" cy="0"/>
-        </a:xfrm>
-      </p:grpSpPr>
-      <p:sp>
-        <p:nvSpPr>
-          <p:cNvPr id="2" name="Slide Image Placeholder 1"/>
-          <p:cNvSpPr>
-            <a:spLocks noGrp="1"/>
-          </p:cNvSpPr>
-          <p:nvPr>
-            <p:ph type="sldImg" idx="2"/>
-          </p:nvPr>
-        </p:nvSpPr>
-        <p:spPr/>
-      </p:sp>
-      <p:sp>
-        <p:nvSpPr>
-          <p:cNvPr id="3" name="Notes Placeholder 2"/>
-          <p:cNvSpPr>
-            <a:spLocks noGrp="1"/>
-          </p:cNvSpPr>
-          <p:nvPr>
-            <p:ph type="body" idx="3" sz="quarter"/>
-          </p:nvPr>
-        </p:nvSpPr>
-        <p:spPr/>
-        <p:txBody>
-          <a:bodyPr/>
-          <a:lstStyle/>
-          <a:p>
-            <a:r>
-              <a:t>3 minutos. Sin apuntes. Es para recordar, no cuenta para nota.</a:t>
-            </a:r>
-          </a:p>
-        </p:txBody>
-      </p:sp>
-      <p:sp>
-        <p:nvSpPr>
-          <p:cNvPr id="4" name="Slide Number Placeholder 3"/>
-          <p:cNvSpPr>
-            <a:spLocks noGrp="1"/>
-          </p:cNvSpPr>
-          <p:nvPr>
-            <p:ph type="sldNum" idx="5" sz="quarter"/>
-          </p:nvPr>
-        </p:nvSpPr>
-        <p:spPr/>
-      </p:sp>
-    </p:spTree>
-  </p:cSld>
-  <p:clrMapOvr>
-    <a:masterClrMapping/>
-  </p:clrMapOvr>
-</p:notes>
-</file>
-
-<file path=ppt/notesSlides/notesSlide3.xml><?xml version="1.0" encoding="utf-8"?>
-<p:notes xmlns:a="http://schemas.openxmlformats.org/drawingml/2006/main" xmlns:p="http://schemas.openxmlformats.org/presentationml/2006/main" xmlns:r="http://schemas.openxmlformats.org/officeDocument/2006/relationships">
-  <p:cSld>
-    <p:spTree>
-      <p:nvGrpSpPr>
-        <p:cNvPr id="1" name=""/>
-        <p:cNvGrpSpPr/>
-        <p:nvPr/>
-      </p:nvGrpSpPr>
-      <p:grpSpPr>
-        <a:xfrm>
-          <a:off x="0" y="0"/>
-          <a:ext cx="0" cy="0"/>
-          <a:chOff x="0" y="0"/>
-          <a:chExt cx="0" cy="0"/>
-        </a:xfrm>
-      </p:grpSpPr>
-      <p:sp>
-        <p:nvSpPr>
-          <p:cNvPr id="2" name="Slide Image Placeholder 1"/>
-          <p:cNvSpPr>
-            <a:spLocks noGrp="1"/>
-          </p:cNvSpPr>
-          <p:nvPr>
-            <p:ph type="sldImg" idx="2"/>
-          </p:nvPr>
-        </p:nvSpPr>
-        <p:spPr/>
-      </p:sp>
-      <p:sp>
-        <p:nvSpPr>
-          <p:cNvPr id="3" name="Notes Placeholder 2"/>
-          <p:cNvSpPr>
-            <a:spLocks noGrp="1"/>
-          </p:cNvSpPr>
-          <p:nvPr>
-            <p:ph type="body" idx="3" sz="quarter"/>
-          </p:nvPr>
-        </p:nvSpPr>
-        <p:spPr/>
-        <p:txBody>
-          <a:bodyPr/>
-          <a:lstStyle/>
-          <a:p>
-            <a:r>
-              <a:t>Nadie tiene que contestar: solo pensarlo.</a:t>
-            </a:r>
-          </a:p>
-        </p:txBody>
-      </p:sp>
-      <p:sp>
-        <p:nvSpPr>
-          <p:cNvPr id="4" name="Slide Number Placeholder 3"/>
-          <p:cNvSpPr>
-            <a:spLocks noGrp="1"/>
-          </p:cNvSpPr>
-          <p:nvPr>
-            <p:ph type="sldNum" idx="5" sz="quarter"/>
-          </p:nvPr>
-        </p:nvSpPr>
-        <p:spPr/>
-      </p:sp>
-    </p:spTree>
-  </p:cSld>
-  <p:clrMapOvr>
-    <a:masterClrMapping/>
-  </p:clrMapOvr>
-</p:notes>
-</file>
-
-<file path=ppt/notesSlides/notesSlide4.xml><?xml version="1.0" encoding="utf-8"?>
-<p:notes xmlns:a="http://schemas.openxmlformats.org/drawingml/2006/main" xmlns:p="http://schemas.openxmlformats.org/presentationml/2006/main" xmlns:r="http://schemas.openxmlformats.org/officeDocument/2006/relationships">
-  <p:cSld>
-    <p:spTree>
-      <p:nvGrpSpPr>
-        <p:cNvPr id="1" name=""/>
-        <p:cNvGrpSpPr/>
-        <p:nvPr/>
-      </p:nvGrpSpPr>
-      <p:grpSpPr>
-        <a:xfrm>
-          <a:off x="0" y="0"/>
-          <a:ext cx="0" cy="0"/>
-          <a:chOff x="0" y="0"/>
-          <a:chExt cx="0" cy="0"/>
-        </a:xfrm>
-      </p:grpSpPr>
-      <p:sp>
-        <p:nvSpPr>
-          <p:cNvPr id="2" name="Slide Image Placeholder 1"/>
-          <p:cNvSpPr>
-            <a:spLocks noGrp="1"/>
-          </p:cNvSpPr>
-          <p:nvPr>
-            <p:ph type="sldImg" idx="2"/>
-          </p:nvPr>
-        </p:nvSpPr>
-        <p:spPr/>
-      </p:sp>
-      <p:sp>
-        <p:nvSpPr>
-          <p:cNvPr id="3" name="Notes Placeholder 2"/>
-          <p:cNvSpPr>
-            <a:spLocks noGrp="1"/>
-          </p:cNvSpPr>
-          <p:nvPr>
-            <p:ph type="body" idx="3" sz="quarter"/>
-          </p:nvPr>
-        </p:nvSpPr>
-        <p:spPr/>
-        <p:txBody>
-          <a:bodyPr/>
-          <a:lstStyle/>
-          <a:p>
-            <a:r>
-              <a:t>Dejar unos segundos para que piensen la respuesta fácil antes de enseñar los pasos.</a:t>
-            </a:r>
-          </a:p>
-        </p:txBody>
-      </p:sp>
-      <p:sp>
-        <p:nvSpPr>
-          <p:cNvPr id="4" name="Slide Number Placeholder 3"/>
-          <p:cNvSpPr>
-            <a:spLocks noGrp="1"/>
-          </p:cNvSpPr>
-          <p:nvPr>
-            <p:ph type="sldNum" idx="5" sz="quarter"/>
-          </p:nvPr>
-        </p:nvSpPr>
-        <p:spPr/>
-      </p:sp>
-    </p:spTree>
-  </p:cSld>
-  <p:clrMapOvr>
-    <a:masterClrMapping/>
-  </p:clrMapOvr>
-</p:notes>
-</file>
-
-<file path=ppt/notesSlides/notesSlide5.xml><?xml version="1.0" encoding="utf-8"?>
-<p:notes xmlns:a="http://schemas.openxmlformats.org/drawingml/2006/main" xmlns:p="http://schemas.openxmlformats.org/presentationml/2006/main" xmlns:r="http://schemas.openxmlformats.org/officeDocument/2006/relationships">
-  <p:cSld>
-    <p:spTree>
-      <p:nvGrpSpPr>
-        <p:cNvPr id="1" name=""/>
-        <p:cNvGrpSpPr/>
-        <p:nvPr/>
-      </p:nvGrpSpPr>
-      <p:grpSpPr>
-        <a:xfrm>
-          <a:off x="0" y="0"/>
-          <a:ext cx="0" cy="0"/>
-          <a:chOff x="0" y="0"/>
-          <a:chExt cx="0" cy="0"/>
-        </a:xfrm>
-      </p:grpSpPr>
-      <p:sp>
-        <p:nvSpPr>
-          <p:cNvPr id="2" name="Slide Image Placeholder 1"/>
-          <p:cNvSpPr>
-            <a:spLocks noGrp="1"/>
-          </p:cNvSpPr>
-          <p:nvPr>
-            <p:ph type="sldImg" idx="2"/>
-          </p:nvPr>
-        </p:nvSpPr>
-        <p:spPr/>
-      </p:sp>
-      <p:sp>
-        <p:nvSpPr>
-          <p:cNvPr id="3" name="Notes Placeholder 2"/>
-          <p:cNvSpPr>
-            <a:spLocks noGrp="1"/>
-          </p:cNvSpPr>
-          <p:nvPr>
-            <p:ph type="body" idx="3" sz="quarter"/>
-          </p:nvPr>
-        </p:nvSpPr>
-        <p:spPr/>
-        <p:txBody>
-          <a:bodyPr/>
-          <a:lstStyle/>
-          <a:p>
-            <a:r>
-              <a:t>Dejar 2 minutos para que lo escriban. La diapositiva siguiente muestra el resumen.</a:t>
-            </a:r>
-          </a:p>
-        </p:txBody>
-      </p:sp>
-      <p:sp>
-        <p:nvSpPr>
-          <p:cNvPr id="4" name="Slide Number Placeholder 3"/>
-          <p:cNvSpPr>
-            <a:spLocks noGrp="1"/>
-          </p:cNvSpPr>
-          <p:nvPr>
-            <p:ph type="sldNum" idx="5" sz="quarter"/>
-          </p:nvPr>
-        </p:nvSpPr>
-        <p:spPr/>
-      </p:sp>
-    </p:spTree>
-  </p:cSld>
-  <p:clrMapOvr>
-    <a:masterClrMapping/>
-  </p:clrMapOvr>
-</p:notes>
-</file>
-
-<file path=ppt/notesSlides/notesSlide6.xml><?xml version="1.0" encoding="utf-8"?>
-<p:notes xmlns:a="http://schemas.openxmlformats.org/drawingml/2006/main" xmlns:p="http://schemas.openxmlformats.org/presentationml/2006/main" xmlns:r="http://schemas.openxmlformats.org/officeDocument/2006/relationships">
-  <p:cSld>
-    <p:spTree>
-      <p:nvGrpSpPr>
-        <p:cNvPr id="1" name=""/>
-        <p:cNvGrpSpPr/>
-        <p:nvPr/>
-      </p:nvGrpSpPr>
-      <p:grpSpPr>
-        <a:xfrm>
-          <a:off x="0" y="0"/>
-          <a:ext cx="0" cy="0"/>
-          <a:chOff x="0" y="0"/>
-          <a:chExt cx="0" cy="0"/>
-        </a:xfrm>
-      </p:grpSpPr>
-      <p:sp>
-        <p:nvSpPr>
-          <p:cNvPr id="2" name="Slide Image Placeholder 1"/>
-          <p:cNvSpPr>
-            <a:spLocks noGrp="1"/>
-          </p:cNvSpPr>
-          <p:nvPr>
-            <p:ph type="sldImg" idx="2"/>
-          </p:nvPr>
-        </p:nvSpPr>
-        <p:spPr/>
-      </p:sp>
-      <p:sp>
-        <p:nvSpPr>
-          <p:cNvPr id="3" name="Notes Placeholder 2"/>
-          <p:cNvSpPr>
-            <a:spLocks noGrp="1"/>
-          </p:cNvSpPr>
-          <p:nvPr>
-            <p:ph type="body" idx="3" sz="quarter"/>
-          </p:nvPr>
-        </p:nvSpPr>
-        <p:spPr/>
-        <p:txBody>
-          <a:bodyPr/>
-          <a:lstStyle/>
-          <a:p>
-            <a:r>
-              <a:t>Buscar: «efecto halo psicología» · «efecto halo ejemplos»</a:t>
-            </a:r>
-          </a:p>
-        </p:txBody>
-      </p:sp>
-      <p:sp>
-        <p:nvSpPr>
-          <p:cNvPr id="4" name="Slide Number Placeholder 3"/>
-          <p:cNvSpPr>
-            <a:spLocks noGrp="1"/>
-          </p:cNvSpPr>
-          <p:nvPr>
-            <p:ph type="sldNum" idx="5" sz="quarter"/>
-          </p:nvPr>
-        </p:nvSpPr>
-        <p:spPr/>
-      </p:sp>
-    </p:spTree>
-  </p:cSld>
-  <p:clrMapOvr>
-    <a:masterClrMapping/>
-  </p:clrMapOvr>
-</p:notes>
 </file>
 
 <file path=ppt/slideLayouts/slideLayout1.xml><?xml version="1.0" encoding="utf-8"?>

--- a/curso/pptx/S45.pptx
+++ b/curso/pptx/S45.pptx
@@ -4417,7 +4417,7 @@
                 </a:solidFill>
                 <a:latin typeface="Nunito Sans"/>
               </a:rPr>
-              <a:t>El primer día, Aitor no saludó a nadie. Algunos decidieron: «Es un borde». En realidad, estaba nervioso.</a:t>
+              <a:t>El primer día de campamento, un chico no saludó a nadie. Algunos decidieron: «Es un borde». En realidad, estaba nervioso.</a:t>
             </a:r>
           </a:p>
         </p:txBody>
@@ -4490,7 +4490,7 @@
                 </a:solidFill>
                 <a:latin typeface="Nunito Sans"/>
               </a:rPr>
-              <a:t>Después, todo lo que hacía Aitor parecía confirmarla (sesión 44).</a:t>
+              <a:t>Después, todo lo que hacía ese chico parecía confirmarla (sesión 44).</a:t>
             </a:r>
           </a:p>
           <a:p>
@@ -4726,7 +4726,7 @@
                 </a:solidFill>
                 <a:latin typeface="Nunito Sans"/>
               </a:rPr>
-              <a:t>Para el equipo de fútbol del recreo, Leire elige primero a Aitor. Lo ha visto marcar muchos goles todas las semanas.</a:t>
+              <a:t>Para el equipo de fútbol del recreo, una chica elige primero a un chico. Lo ha visto marcar muchos goles todas las semanas.</a:t>
             </a:r>
           </a:p>
         </p:txBody>
@@ -5981,7 +5981,7 @@
                 </a:solidFill>
                 <a:latin typeface="Nunito Sans"/>
               </a:rPr>
-              <a:t>En la tarea 2-4-6 de Wason, la regla secreta era: tres números que van ______.  (sesión 44)</a:t>
+              <a:t>En la tarea 2-4-6, la regla era: tres números que van ______.  (sesión 44)</a:t>
             </a:r>
           </a:p>
           <a:p>
@@ -6183,7 +6183,7 @@
                 </a:solidFill>
                 <a:latin typeface="Nunito Sans"/>
               </a:rPr>
-              <a:t>En la tarea 2-4-6 de Wason, la regla secreta era: tres números que van </a:t>
+              <a:t>En la tarea 2-4-6, la regla era: tres números que van </a:t>
             </a:r>
             <a:r>
               <a:rPr sz="2600" b="1">
@@ -6434,7 +6434,7 @@
                 </a:solidFill>
                 <a:latin typeface="Nunito Sans"/>
               </a:rPr>
-              <a:t>Un chico nuevo llega a clase con ropa de marca y sonriendo. Otro llega serio y despeinado.</a:t>
+              <a:t>Dos candidatos a monitor del campamento: uno llega con ropa de marca y sonriendo; otro, serio y despeinado.</a:t>
             </a:r>
           </a:p>
         </p:txBody>
@@ -6473,7 +6473,7 @@
                 </a:solidFill>
                 <a:latin typeface="Nunito Sans"/>
               </a:rPr>
-              <a:t>¿Cuál crees que sacará mejores notas? ¿Por qué lo has pensado?</a:t>
+              <a:t>¿Cuál crees que será mejor monitor? ¿Por qué lo has pensado?</a:t>
             </a:r>
           </a:p>
         </p:txBody>

--- a/curso/pptx/S45.pptx
+++ b/curso/pptx/S45.pptx
@@ -22,6 +22,8 @@
     <p:sldId id="270" r:id="rId22"/>
     <p:sldId id="271" r:id="rId23"/>
     <p:sldId id="272" r:id="rId24"/>
+    <p:sldId id="273" r:id="rId25"/>
+    <p:sldId id="274" r:id="rId26"/>
   </p:sldIdLst>
   <p:sldSz cx="12192000" cy="6858000" type="screen4x3"/>
   <p:notesSz cx="6858000" cy="9144000"/>
@@ -3574,7 +3576,7 @@
                 </a:solidFill>
                 <a:latin typeface="Fredoka"/>
               </a:rPr>
-              <a:t>Efecto halo y primeras impresiones</a:t>
+              <a:t>Sesgo de confirmación</a:t>
             </a:r>
           </a:p>
         </p:txBody>
@@ -3613,7 +3615,7 @@
                 </a:solidFill>
                 <a:latin typeface="Nunito Sans"/>
               </a:rPr>
-              <a:t>El efecto halo es juzgar a una persona entera por un solo rasgo, como su aspecto, su fama o una primera impresión.</a:t>
+              <a:t>El sesgo de confirmación es buscar, recordar y creer solo lo que nos da la razón, y olvidar lo que nos la quita.</a:t>
             </a:r>
           </a:p>
         </p:txBody>
@@ -3717,7 +3719,7 @@
                 </a:solidFill>
                 <a:latin typeface="Fredoka"/>
               </a:rPr>
-              <a:t>Caso 1 · El famoso del anuncio</a:t>
+              <a:t>Caso 1 · El ladrón de hachas</a:t>
             </a:r>
           </a:p>
         </p:txBody>
@@ -3799,7 +3801,7 @@
                 </a:solidFill>
                 <a:latin typeface="Nunito Sans"/>
               </a:rPr>
-              <a:t>Un jugador de fútbol famoso anuncia un champú. «Si él lo usa, será bueno».</a:t>
+              <a:t>Un cuento antiguo de China: un campesino pierde su hacha y sospecha del hijo del vecino. Todo lo que hace el chico le parece «de ladrón». Luego encuentra el hacha en su leña.</a:t>
             </a:r>
           </a:p>
         </p:txBody>
@@ -3847,7 +3849,7 @@
                 </a:solidFill>
                 <a:latin typeface="Nunito Sans"/>
               </a:rPr>
-              <a:t>¿Qué rasgo veo? Que juega muy bien al fútbol.</a:t>
+              <a:t>¿Qué cree el campesino? Que el chico le ha robado el hacha.</a:t>
             </a:r>
           </a:p>
           <a:p>
@@ -3872,7 +3874,7 @@
                 </a:solidFill>
                 <a:latin typeface="Nunito Sans"/>
               </a:rPr>
-              <a:t>¿Qué deduzco? Que sabe de champús. No tiene nada que ver.</a:t>
+              <a:t>Por eso interpreta todo a favor de su idea: caminar deprisa, sonreír o callarse le parece «de ladrón».</a:t>
             </a:r>
           </a:p>
           <a:p>
@@ -3897,7 +3899,7 @@
                 </a:solidFill>
                 <a:latin typeface="Nunito Sans"/>
               </a:rPr>
-              <a:t>Es el efecto halo, y la marca lo sabe: por eso le paga.</a:t>
+              <a:t>Encuentra el hacha en su propio montón de leña… y el chico vuelve a parecerle normal.</a:t>
             </a:r>
           </a:p>
           <a:p>
@@ -3922,7 +3924,7 @@
                 </a:solidFill>
                 <a:latin typeface="Nunito Sans"/>
               </a:rPr>
-              <a:t>Conclusión: ser bueno en una cosa no te hace experto en otra. Lo vimos en la sesión 27.</a:t>
+              <a:t>Conclusión: sesgo de confirmación. El chico no cambió: cambió la mirada del campesino.</a:t>
             </a:r>
           </a:p>
         </p:txBody>
@@ -4026,7 +4028,7 @@
                 </a:solidFill>
                 <a:latin typeface="Fredoka"/>
               </a:rPr>
-              <a:t>Caso 2 · La letra bonita</a:t>
+              <a:t>Caso 2 · La búsqueda en internet</a:t>
             </a:r>
           </a:p>
         </p:txBody>
@@ -4108,7 +4110,7 @@
                 </a:solidFill>
                 <a:latin typeface="Nunito Sans"/>
               </a:rPr>
-              <a:t>Dos exámenes con las mismas respuestas. Uno tiene letra clara y limpia; el otro, letra difícil y tachones. (Ejemplo inventado.)</a:t>
+              <a:t>Un chico cree que las bebidas energéticas le ayudan a estudiar. Busca: «beneficios de las bebidas energéticas para estudiar».</a:t>
             </a:r>
           </a:p>
         </p:txBody>
@@ -4156,7 +4158,7 @@
                 </a:solidFill>
                 <a:latin typeface="Nunito Sans"/>
               </a:rPr>
-              <a:t>El contenido es el mismo: deberían tener la misma nota.</a:t>
+              <a:t>La búsqueda ya lleva la respuesta: solo pide beneficios.</a:t>
             </a:r>
           </a:p>
           <a:p>
@@ -4181,7 +4183,7 @@
                 </a:solidFill>
                 <a:latin typeface="Nunito Sans"/>
               </a:rPr>
-              <a:t>Pero la letra bonita da buena impresión de todo el examen.</a:t>
+              <a:t>Encontrará páginas que le dan la razón y se quedará tranquilo.</a:t>
             </a:r>
           </a:p>
           <a:p>
@@ -4206,7 +4208,7 @@
                 </a:solidFill>
                 <a:latin typeface="Nunito Sans"/>
               </a:rPr>
-              <a:t>Es fácil puntuar un poco mejor el limpio sin darse cuenta.</a:t>
+              <a:t>Una búsqueda más justa: «bebidas energéticas y estudio: ventajas y riesgos».</a:t>
             </a:r>
           </a:p>
           <a:p>
@@ -4231,7 +4233,7 @@
                 </a:solidFill>
                 <a:latin typeface="Nunito Sans"/>
               </a:rPr>
-              <a:t>Conclusión: halo. Por eso ayuda corregir con criterios escritos y sin mirar el nombre.</a:t>
+              <a:t>Conclusión: sesgo de confirmación al buscar. Hay que buscar también lo que me puede quitar la razón.</a:t>
             </a:r>
           </a:p>
         </p:txBody>
@@ -4335,7 +4337,7 @@
                 </a:solidFill>
                 <a:latin typeface="Fredoka"/>
               </a:rPr>
-              <a:t>Caso 3 · El primer día</a:t>
+              <a:t>Caso 3 · La tarea 2-4-6</a:t>
             </a:r>
           </a:p>
         </p:txBody>
@@ -4417,7 +4419,7 @@
                 </a:solidFill>
                 <a:latin typeface="Nunito Sans"/>
               </a:rPr>
-              <a:t>El primer día de campamento, un chico no saludó a nadie. Algunos decidieron: «Es un borde». En realidad, estaba nervioso.</a:t>
+              <a:t>Experimento de Peter Wason (1960): «La serie 2-4-6 cumple una regla secreta. Propón otras series y te digo si la cumplen».</a:t>
             </a:r>
           </a:p>
         </p:txBody>
@@ -4465,7 +4467,7 @@
                 </a:solidFill>
                 <a:latin typeface="Nunito Sans"/>
               </a:rPr>
-              <a:t>La primera impresión se formó en un momento.</a:t>
+              <a:t>Mucha gente prueba 8-10-12, 20-22-24… Todas cumplen. «¡La regla es sumar 2!».</a:t>
             </a:r>
           </a:p>
           <a:p>
@@ -4490,7 +4492,7 @@
                 </a:solidFill>
                 <a:latin typeface="Nunito Sans"/>
               </a:rPr>
-              <a:t>Después, todo lo que hacía ese chico parecía confirmarla (sesión 44).</a:t>
+              <a:t>Pero la regla era más sencilla: «tres números que van subiendo».</a:t>
             </a:r>
           </a:p>
           <a:p>
@@ -4515,7 +4517,7 @@
                 </a:solidFill>
                 <a:latin typeface="Nunito Sans"/>
               </a:rPr>
-              <a:t>Nadie pensó en otras explicaciones: nervios, timidez, un mal día.</a:t>
+              <a:t>Pocos probaron series que pudieran fallar, como 6-4-2 o 1-5-100.</a:t>
             </a:r>
           </a:p>
           <a:p>
@@ -4540,7 +4542,7 @@
                 </a:solidFill>
                 <a:latin typeface="Nunito Sans"/>
               </a:rPr>
-              <a:t>Conclusión: una primera impresión es una suposición, no un juicio final. Dale tiempo a la persona.</a:t>
+              <a:t>Conclusión: buscamos ejemplos que confirman nuestra idea. Es mejor buscar contraejemplos, como en la sesión 17.</a:t>
             </a:r>
           </a:p>
         </p:txBody>
@@ -4644,7 +4646,7 @@
                 </a:solidFill>
                 <a:latin typeface="Fredoka"/>
               </a:rPr>
-              <a:t>⚠ ¿Un rasgo que sí cuenta?</a:t>
+              <a:t>⚠ ¿Cerrado o bien informado?</a:t>
             </a:r>
           </a:p>
         </p:txBody>
@@ -4726,7 +4728,7 @@
                 </a:solidFill>
                 <a:latin typeface="Nunito Sans"/>
               </a:rPr>
-              <a:t>Para el equipo de fútbol del recreo, una chica elige primero a un chico. Lo ha visto marcar muchos goles todas las semanas.</a:t>
+              <a:t>Un chico cree que fumar es malo para la salud. Ve un vídeo, sin ninguna fuente, que dice lo contrario. No le hace caso.</a:t>
             </a:r>
           </a:p>
         </p:txBody>
@@ -4774,7 +4776,7 @@
                 </a:solidFill>
                 <a:latin typeface="Nunito Sans"/>
               </a:rPr>
-              <a:t>Lo elige por un solo rasgo… ¿es efecto halo?</a:t>
+              <a:t>Solo acepta lo que le da la razón… ¿es sesgo de confirmación?</a:t>
             </a:r>
           </a:p>
           <a:p>
@@ -4799,7 +4801,7 @@
                 </a:solidFill>
                 <a:latin typeface="Nunito Sans"/>
               </a:rPr>
-              <a:t>Parece que sí: lo juzga por una sola cosa, los goles.</a:t>
+              <a:t>Parece que sí: rechaza lo que le quita la razón.</a:t>
             </a:r>
           </a:p>
           <a:p>
@@ -4824,7 +4826,7 @@
                 </a:solidFill>
                 <a:latin typeface="Nunito Sans"/>
               </a:rPr>
-              <a:t>Pero ese rasgo tiene que ver con lo que decide: quién juega bien al fútbol.</a:t>
+              <a:t>Pero mira las pruebas: su idea tiene miles de estudios detrás; el vídeo, ninguna fuente.</a:t>
             </a:r>
           </a:p>
           <a:p>
@@ -4849,7 +4851,7 @@
                 </a:solidFill>
                 <a:latin typeface="Nunito Sans"/>
               </a:rPr>
-              <a:t>Halo sería pensar que, como marca goles, también es buen estudiante o buena persona.</a:t>
+              <a:t>El sesgo es tratar peor una prueba solo porque me quita la razón. Aquí la prueba es mala.</a:t>
             </a:r>
           </a:p>
           <a:p>
@@ -4874,7 +4876,7 @@
                 </a:solidFill>
                 <a:latin typeface="Nunito Sans"/>
               </a:rPr>
-              <a:t>Conclusión: usar un rasgo que viene a cuento es una buena razón. El halo es estirarlo a lo demás.</a:t>
+              <a:t>Conclusión: no cambiar de opinión por una mala razón no es un sesgo. Sí lo sería ignorar una buena prueba.</a:t>
             </a:r>
           </a:p>
         </p:txBody>
@@ -4893,7 +4895,7 @@
     <p:bg>
       <p:bgPr>
         <a:solidFill>
-          <a:srgbClr val="FBF7EF"/>
+          <a:srgbClr val="1F2A44"/>
         </a:solidFill>
         <a:effectLst/>
       </p:bgPr>
@@ -4913,8 +4915,8 @@
         </p:nvSpPr>
         <p:spPr>
           <a:xfrm>
-            <a:off x="640000" y="380000"/>
-            <a:ext cx="10912000" cy="420000"/>
+            <a:off x="640000" y="2300000"/>
+            <a:ext cx="10912000" cy="500000"/>
           </a:xfrm>
           <a:prstGeom prst="rect">
             <a:avLst/>
@@ -4929,17 +4931,17 @@
           <a:p>
             <a:pPr>
               <a:spcAft>
-                <a:spcPts val="630"/>
-              </a:spcAft>
-            </a:pPr>
-            <a:r>
-              <a:rPr sz="1400" b="1">
-                <a:solidFill>
-                  <a:srgbClr val="E8793A"/>
-                </a:solidFill>
-                <a:latin typeface="Nunito Sans"/>
-              </a:rPr>
-              <a:t>LO DE HOY EN TRES LÍNEAS</a:t>
+                <a:spcPts val="810"/>
+              </a:spcAft>
+            </a:pPr>
+            <a:r>
+              <a:rPr sz="1800" b="1">
+                <a:solidFill>
+                  <a:srgbClr val="F4B183"/>
+                </a:solidFill>
+                <a:latin typeface="Nunito Sans"/>
+              </a:rPr>
+              <a:t>BLOQUE 3</a:t>
             </a:r>
           </a:p>
         </p:txBody>
@@ -4952,7 +4954,7 @@
         </p:nvSpPr>
         <p:spPr>
           <a:xfrm>
-            <a:off x="640000" y="760000"/>
+            <a:off x="640000" y="2800000"/>
             <a:ext cx="10912000" cy="800000"/>
           </a:xfrm>
           <a:prstGeom prst="rect">
@@ -4968,56 +4970,17 @@
           <a:p>
             <a:pPr>
               <a:spcAft>
-                <a:spcPts val="1710"/>
-              </a:spcAft>
-            </a:pPr>
-            <a:r>
-              <a:rPr sz="3800" b="1">
-                <a:solidFill>
-                  <a:srgbClr val="1F2A44"/>
+                <a:spcPts val="2160"/>
+              </a:spcAft>
+            </a:pPr>
+            <a:r>
+              <a:rPr sz="4800" b="1">
+                <a:solidFill>
+                  <a:srgbClr val="FBF7EF"/>
                 </a:solidFill>
                 <a:latin typeface="Fredoka"/>
               </a:rPr>
-              <a:t>Escríbelo tú primero, sin mirar</a:t>
-            </a:r>
-          </a:p>
-        </p:txBody>
-      </p:sp>
-      <p:sp>
-        <p:nvSpPr>
-          <p:cNvPr id="4" name="TextBox 3"/>
-          <p:cNvSpPr txBox="1"/>
-          <p:nvPr/>
-        </p:nvSpPr>
-        <p:spPr>
-          <a:xfrm>
-            <a:off x="640000" y="1800000"/>
-            <a:ext cx="10912000" cy="1500000"/>
-          </a:xfrm>
-          <a:prstGeom prst="rect">
-            <a:avLst/>
-          </a:prstGeom>
-          <a:noFill/>
-        </p:spPr>
-        <p:txBody>
-          <a:bodyPr wrap="square">
-            <a:spAutoFit/>
-          </a:bodyPr>
-          <a:lstStyle/>
-          <a:p>
-            <a:pPr>
-              <a:spcAft>
-                <a:spcPts val="1170"/>
-              </a:spcAft>
-            </a:pPr>
-            <a:r>
-              <a:rPr sz="2600" b="0">
-                <a:solidFill>
-                  <a:srgbClr val="4A5568"/>
-                </a:solidFill>
-                <a:latin typeface="Nunito Sans"/>
-              </a:rPr>
-              <a:t>Dos minutos. Después lo comparamos.</a:t>
+              <a:t>Cómo frenarlo</a:t>
             </a:r>
           </a:p>
         </p:txBody>
@@ -5082,7 +5045,7 @@
                 </a:solidFill>
                 <a:latin typeface="Nunito Sans"/>
               </a:rPr>
-              <a:t>LO DE HOY EN TRES LÍNEAS</a:t>
+              <a:t>BLOQUE 3 · CÓMO FRENARLO</a:t>
             </a:r>
           </a:p>
         </p:txBody>
@@ -5095,8 +5058,8 @@
         </p:nvSpPr>
         <p:spPr>
           <a:xfrm>
-            <a:off x="640000" y="1300000"/>
-            <a:ext cx="10912000" cy="4800000"/>
+            <a:off x="640000" y="760000"/>
+            <a:ext cx="10912000" cy="800000"/>
           </a:xfrm>
           <a:prstGeom prst="rect">
             <a:avLst/>
@@ -5111,76 +5074,158 @@
           <a:p>
             <a:pPr>
               <a:spcAft>
-                <a:spcPts val="1350"/>
-              </a:spcAft>
-            </a:pPr>
-            <a:r>
-              <a:rPr sz="3000" b="1">
+                <a:spcPts val="1710"/>
+              </a:spcAft>
+            </a:pPr>
+            <a:r>
+              <a:rPr sz="3800" b="1">
+                <a:solidFill>
+                  <a:srgbClr val="1F2A44"/>
+                </a:solidFill>
+                <a:latin typeface="Fredoka"/>
+              </a:rPr>
+              <a:t>Cuatro frenos al sesgo de confirmación</a:t>
+            </a:r>
+          </a:p>
+        </p:txBody>
+      </p:sp>
+      <p:sp>
+        <p:nvSpPr>
+          <p:cNvPr id="4" name="TextBox 3"/>
+          <p:cNvSpPr txBox="1"/>
+          <p:nvPr/>
+        </p:nvSpPr>
+        <p:spPr>
+          <a:xfrm>
+            <a:off x="640000" y="1650000"/>
+            <a:ext cx="10912000" cy="4808000"/>
+          </a:xfrm>
+          <a:prstGeom prst="rect">
+            <a:avLst/>
+          </a:prstGeom>
+          <a:noFill/>
+        </p:spPr>
+        <p:txBody>
+          <a:bodyPr wrap="square">
+            <a:spAutoFit/>
+          </a:bodyPr>
+          <a:lstStyle/>
+          <a:p>
+            <a:pPr>
+              <a:spcAft>
+                <a:spcPts val="1260"/>
+              </a:spcAft>
+            </a:pPr>
+            <a:r>
+              <a:rPr sz="2800" b="1">
                 <a:solidFill>
                   <a:srgbClr val="E8793A"/>
                 </a:solidFill>
                 <a:latin typeface="Nunito Sans"/>
               </a:rPr>
-              <a:t>1. </a:t>
-            </a:r>
-            <a:r>
-              <a:rPr sz="3000" b="0">
+              <a:t>• </a:t>
+            </a:r>
+            <a:r>
+              <a:rPr sz="2800" b="0">
                 <a:solidFill>
                   <a:srgbClr val="1F2A44"/>
                 </a:solidFill>
                 <a:latin typeface="Nunito Sans"/>
               </a:rPr>
-              <a:t>El efecto halo es juzgar a alguien entero por un solo rasgo.</a:t>
-            </a:r>
-          </a:p>
-          <a:p>
-            <a:pPr>
-              <a:spcAft>
-                <a:spcPts val="1350"/>
-              </a:spcAft>
-            </a:pPr>
-            <a:r>
-              <a:rPr sz="3000" b="1">
+              <a:t>Preguntarme: «¿qué me haría cambiar de opinión?»</a:t>
+            </a:r>
+          </a:p>
+          <a:p>
+            <a:pPr>
+              <a:spcAft>
+                <a:spcPts val="1260"/>
+              </a:spcAft>
+            </a:pPr>
+            <a:r>
+              <a:rPr sz="2800" b="1">
                 <a:solidFill>
                   <a:srgbClr val="E8793A"/>
                 </a:solidFill>
                 <a:latin typeface="Nunito Sans"/>
               </a:rPr>
-              <a:t>2. </a:t>
-            </a:r>
-            <a:r>
-              <a:rPr sz="3000" b="0">
+              <a:t>• </a:t>
+            </a:r>
+            <a:r>
+              <a:rPr sz="2800" b="0">
                 <a:solidFill>
                   <a:srgbClr val="1F2A44"/>
                 </a:solidFill>
                 <a:latin typeface="Nunito Sans"/>
               </a:rPr>
-              <a:t>Las primeras impresiones se forman muy rápido y cuesta cambiarlas.</a:t>
-            </a:r>
-          </a:p>
-          <a:p>
-            <a:pPr>
-              <a:spcAft>
-                <a:spcPts val="1350"/>
-              </a:spcAft>
-            </a:pPr>
-            <a:r>
-              <a:rPr sz="3000" b="1">
+              <a:t>Buscar a propósito lo que dice lo contrario</a:t>
+            </a:r>
+          </a:p>
+          <a:p>
+            <a:pPr>
+              <a:spcAft>
+                <a:spcPts val="1260"/>
+              </a:spcAft>
+            </a:pPr>
+            <a:r>
+              <a:rPr sz="2800" b="1">
                 <a:solidFill>
                   <a:srgbClr val="E8793A"/>
                 </a:solidFill>
                 <a:latin typeface="Nunito Sans"/>
               </a:rPr>
-              <a:t>3. </a:t>
-            </a:r>
-            <a:r>
-              <a:rPr sz="3000" b="0">
+              <a:t>• </a:t>
+            </a:r>
+            <a:r>
+              <a:rPr sz="2800" b="0">
                 <a:solidFill>
                   <a:srgbClr val="1F2A44"/>
                 </a:solidFill>
                 <a:latin typeface="Nunito Sans"/>
               </a:rPr>
-              <a:t>Un rasgo no dice cómo es una persona: dale tiempo y busca pruebas.</a:t>
+              <a:t>Apuntar los aciertos </a:t>
+            </a:r>
+            <a:r>
+              <a:rPr sz="2800" b="1">
+                <a:solidFill>
+                  <a:srgbClr val="1F2A44"/>
+                </a:solidFill>
+                <a:latin typeface="Nunito Sans"/>
+              </a:rPr>
+              <a:t>y</a:t>
+            </a:r>
+            <a:r>
+              <a:rPr sz="2800" b="0">
+                <a:solidFill>
+                  <a:srgbClr val="1F2A44"/>
+                </a:solidFill>
+                <a:latin typeface="Nunito Sans"/>
+              </a:rPr>
+              <a:t> los fallos</a:t>
+            </a:r>
+          </a:p>
+          <a:p>
+            <a:pPr>
+              <a:spcAft>
+                <a:spcPts val="1260"/>
+              </a:spcAft>
+            </a:pPr>
+            <a:r>
+              <a:rPr sz="2800" b="1">
+                <a:solidFill>
+                  <a:srgbClr val="E8793A"/>
+                </a:solidFill>
+                <a:latin typeface="Nunito Sans"/>
+              </a:rPr>
+              <a:t>• </a:t>
+            </a:r>
+            <a:r>
+              <a:rPr sz="2800" b="0">
+                <a:solidFill>
+                  <a:srgbClr val="1F2A44"/>
+                </a:solidFill>
+                <a:latin typeface="Nunito Sans"/>
+              </a:rPr>
+              <a:t>Escuchar a quien piensa distinto sin preparar la respuesta</a:t>
             </a:r>
           </a:p>
         </p:txBody>
@@ -5194,6 +5239,312 @@
 </file>
 
 <file path=ppt/slides/slide16.xml><?xml version="1.0" encoding="utf-8"?>
+<p:sld xmlns:a="http://schemas.openxmlformats.org/drawingml/2006/main" xmlns:p="http://schemas.openxmlformats.org/presentationml/2006/main" xmlns:r="http://schemas.openxmlformats.org/officeDocument/2006/relationships">
+  <p:cSld>
+    <p:bg>
+      <p:bgPr>
+        <a:solidFill>
+          <a:srgbClr val="FBF7EF"/>
+        </a:solidFill>
+        <a:effectLst/>
+      </p:bgPr>
+    </p:bg>
+    <p:spTree>
+      <p:nvGrpSpPr>
+        <p:cNvPr id="1" name=""/>
+        <p:cNvGrpSpPr/>
+        <p:nvPr/>
+      </p:nvGrpSpPr>
+      <p:grpSpPr/>
+      <p:sp>
+        <p:nvSpPr>
+          <p:cNvPr id="2" name="TextBox 1"/>
+          <p:cNvSpPr txBox="1"/>
+          <p:nvPr/>
+        </p:nvSpPr>
+        <p:spPr>
+          <a:xfrm>
+            <a:off x="640000" y="380000"/>
+            <a:ext cx="10912000" cy="420000"/>
+          </a:xfrm>
+          <a:prstGeom prst="rect">
+            <a:avLst/>
+          </a:prstGeom>
+          <a:noFill/>
+        </p:spPr>
+        <p:txBody>
+          <a:bodyPr wrap="square">
+            <a:spAutoFit/>
+          </a:bodyPr>
+          <a:lstStyle/>
+          <a:p>
+            <a:pPr>
+              <a:spcAft>
+                <a:spcPts val="630"/>
+              </a:spcAft>
+            </a:pPr>
+            <a:r>
+              <a:rPr sz="1400" b="1">
+                <a:solidFill>
+                  <a:srgbClr val="E8793A"/>
+                </a:solidFill>
+                <a:latin typeface="Nunito Sans"/>
+              </a:rPr>
+              <a:t>LO DE HOY EN TRES LÍNEAS</a:t>
+            </a:r>
+          </a:p>
+        </p:txBody>
+      </p:sp>
+      <p:sp>
+        <p:nvSpPr>
+          <p:cNvPr id="3" name="TextBox 2"/>
+          <p:cNvSpPr txBox="1"/>
+          <p:nvPr/>
+        </p:nvSpPr>
+        <p:spPr>
+          <a:xfrm>
+            <a:off x="640000" y="760000"/>
+            <a:ext cx="10912000" cy="800000"/>
+          </a:xfrm>
+          <a:prstGeom prst="rect">
+            <a:avLst/>
+          </a:prstGeom>
+          <a:noFill/>
+        </p:spPr>
+        <p:txBody>
+          <a:bodyPr wrap="square">
+            <a:spAutoFit/>
+          </a:bodyPr>
+          <a:lstStyle/>
+          <a:p>
+            <a:pPr>
+              <a:spcAft>
+                <a:spcPts val="1710"/>
+              </a:spcAft>
+            </a:pPr>
+            <a:r>
+              <a:rPr sz="3800" b="1">
+                <a:solidFill>
+                  <a:srgbClr val="1F2A44"/>
+                </a:solidFill>
+                <a:latin typeface="Fredoka"/>
+              </a:rPr>
+              <a:t>Escríbelo tú primero, sin mirar</a:t>
+            </a:r>
+          </a:p>
+        </p:txBody>
+      </p:sp>
+      <p:sp>
+        <p:nvSpPr>
+          <p:cNvPr id="4" name="TextBox 3"/>
+          <p:cNvSpPr txBox="1"/>
+          <p:nvPr/>
+        </p:nvSpPr>
+        <p:spPr>
+          <a:xfrm>
+            <a:off x="640000" y="1800000"/>
+            <a:ext cx="10912000" cy="1500000"/>
+          </a:xfrm>
+          <a:prstGeom prst="rect">
+            <a:avLst/>
+          </a:prstGeom>
+          <a:noFill/>
+        </p:spPr>
+        <p:txBody>
+          <a:bodyPr wrap="square">
+            <a:spAutoFit/>
+          </a:bodyPr>
+          <a:lstStyle/>
+          <a:p>
+            <a:pPr>
+              <a:spcAft>
+                <a:spcPts val="1170"/>
+              </a:spcAft>
+            </a:pPr>
+            <a:r>
+              <a:rPr sz="2600" b="0">
+                <a:solidFill>
+                  <a:srgbClr val="4A5568"/>
+                </a:solidFill>
+                <a:latin typeface="Nunito Sans"/>
+              </a:rPr>
+              <a:t>Dos minutos. Después lo comparamos.</a:t>
+            </a:r>
+          </a:p>
+        </p:txBody>
+      </p:sp>
+    </p:spTree>
+  </p:cSld>
+  <p:clrMapOvr>
+    <a:masterClrMapping/>
+  </p:clrMapOvr>
+</p:sld>
+</file>
+
+<file path=ppt/slides/slide17.xml><?xml version="1.0" encoding="utf-8"?>
+<p:sld xmlns:a="http://schemas.openxmlformats.org/drawingml/2006/main" xmlns:p="http://schemas.openxmlformats.org/presentationml/2006/main" xmlns:r="http://schemas.openxmlformats.org/officeDocument/2006/relationships">
+  <p:cSld>
+    <p:bg>
+      <p:bgPr>
+        <a:solidFill>
+          <a:srgbClr val="FBF7EF"/>
+        </a:solidFill>
+        <a:effectLst/>
+      </p:bgPr>
+    </p:bg>
+    <p:spTree>
+      <p:nvGrpSpPr>
+        <p:cNvPr id="1" name=""/>
+        <p:cNvGrpSpPr/>
+        <p:nvPr/>
+      </p:nvGrpSpPr>
+      <p:grpSpPr/>
+      <p:sp>
+        <p:nvSpPr>
+          <p:cNvPr id="2" name="TextBox 1"/>
+          <p:cNvSpPr txBox="1"/>
+          <p:nvPr/>
+        </p:nvSpPr>
+        <p:spPr>
+          <a:xfrm>
+            <a:off x="640000" y="380000"/>
+            <a:ext cx="10912000" cy="420000"/>
+          </a:xfrm>
+          <a:prstGeom prst="rect">
+            <a:avLst/>
+          </a:prstGeom>
+          <a:noFill/>
+        </p:spPr>
+        <p:txBody>
+          <a:bodyPr wrap="square">
+            <a:spAutoFit/>
+          </a:bodyPr>
+          <a:lstStyle/>
+          <a:p>
+            <a:pPr>
+              <a:spcAft>
+                <a:spcPts val="630"/>
+              </a:spcAft>
+            </a:pPr>
+            <a:r>
+              <a:rPr sz="1400" b="1">
+                <a:solidFill>
+                  <a:srgbClr val="E8793A"/>
+                </a:solidFill>
+                <a:latin typeface="Nunito Sans"/>
+              </a:rPr>
+              <a:t>LO DE HOY EN TRES LÍNEAS</a:t>
+            </a:r>
+          </a:p>
+        </p:txBody>
+      </p:sp>
+      <p:sp>
+        <p:nvSpPr>
+          <p:cNvPr id="3" name="TextBox 2"/>
+          <p:cNvSpPr txBox="1"/>
+          <p:nvPr/>
+        </p:nvSpPr>
+        <p:spPr>
+          <a:xfrm>
+            <a:off x="640000" y="1300000"/>
+            <a:ext cx="10912000" cy="4800000"/>
+          </a:xfrm>
+          <a:prstGeom prst="rect">
+            <a:avLst/>
+          </a:prstGeom>
+          <a:noFill/>
+        </p:spPr>
+        <p:txBody>
+          <a:bodyPr wrap="square">
+            <a:spAutoFit/>
+          </a:bodyPr>
+          <a:lstStyle/>
+          <a:p>
+            <a:pPr>
+              <a:spcAft>
+                <a:spcPts val="1350"/>
+              </a:spcAft>
+            </a:pPr>
+            <a:r>
+              <a:rPr sz="3000" b="1">
+                <a:solidFill>
+                  <a:srgbClr val="E8793A"/>
+                </a:solidFill>
+                <a:latin typeface="Nunito Sans"/>
+              </a:rPr>
+              <a:t>1. </a:t>
+            </a:r>
+            <a:r>
+              <a:rPr sz="3000" b="0">
+                <a:solidFill>
+                  <a:srgbClr val="1F2A44"/>
+                </a:solidFill>
+                <a:latin typeface="Nunito Sans"/>
+              </a:rPr>
+              <a:t>El sesgo de confirmación es fijarnos solo en lo que nos da la razón.</a:t>
+            </a:r>
+          </a:p>
+          <a:p>
+            <a:pPr>
+              <a:spcAft>
+                <a:spcPts val="1350"/>
+              </a:spcAft>
+            </a:pPr>
+            <a:r>
+              <a:rPr sz="3000" b="1">
+                <a:solidFill>
+                  <a:srgbClr val="E8793A"/>
+                </a:solidFill>
+                <a:latin typeface="Nunito Sans"/>
+              </a:rPr>
+              <a:t>2. </a:t>
+            </a:r>
+            <a:r>
+              <a:rPr sz="3000" b="0">
+                <a:solidFill>
+                  <a:srgbClr val="1F2A44"/>
+                </a:solidFill>
+                <a:latin typeface="Nunito Sans"/>
+              </a:rPr>
+              <a:t>Buscamos, recordamos e interpretamos a favor de lo que ya creemos.</a:t>
+            </a:r>
+          </a:p>
+          <a:p>
+            <a:pPr>
+              <a:spcAft>
+                <a:spcPts val="1350"/>
+              </a:spcAft>
+            </a:pPr>
+            <a:r>
+              <a:rPr sz="3000" b="1">
+                <a:solidFill>
+                  <a:srgbClr val="E8793A"/>
+                </a:solidFill>
+                <a:latin typeface="Nunito Sans"/>
+              </a:rPr>
+              <a:t>3. </a:t>
+            </a:r>
+            <a:r>
+              <a:rPr sz="3000" b="0">
+                <a:solidFill>
+                  <a:srgbClr val="1F2A44"/>
+                </a:solidFill>
+                <a:latin typeface="Nunito Sans"/>
+              </a:rPr>
+              <a:t>Para frenarlo, busca a propósito lo que podría quitarte la razón.</a:t>
+            </a:r>
+          </a:p>
+        </p:txBody>
+      </p:sp>
+    </p:spTree>
+  </p:cSld>
+  <p:clrMapOvr>
+    <a:masterClrMapping/>
+  </p:clrMapOvr>
+</p:sld>
+</file>
+
+<file path=ppt/slides/slide18.xml><?xml version="1.0" encoding="utf-8"?>
 <p:sld xmlns:a="http://schemas.openxmlformats.org/drawingml/2006/main" xmlns:p="http://schemas.openxmlformats.org/presentationml/2006/main" xmlns:r="http://schemas.openxmlformats.org/officeDocument/2006/relationships">
   <p:cSld>
     <p:bg>
@@ -5284,7 +5635,7 @@
                 </a:solidFill>
                 <a:latin typeface="Fredoka"/>
               </a:rPr>
-              <a:t>El efecto halo en la publicidad y en la vida diaria</a:t>
+              <a:t>El sesgo de confirmación y la tarea 2-4-6</a:t>
             </a:r>
           </a:p>
         </p:txBody>
@@ -5323,7 +5674,7 @@
                 </a:solidFill>
                 <a:latin typeface="Nunito Sans"/>
               </a:rPr>
-              <a:t>Ver ejemplos de cómo el aspecto o la fama cambian lo que pensamos de alguien.</a:t>
+              <a:t>Ver a gente real intentando adivinar la regla del 2-4-6 y cayendo en el sesgo.</a:t>
             </a:r>
           </a:p>
         </p:txBody>
@@ -5336,7 +5687,7 @@
 </p:sld>
 </file>
 
-<file path=ppt/slides/slide17.xml><?xml version="1.0" encoding="utf-8"?>
+<file path=ppt/slides/slide19.xml><?xml version="1.0" encoding="utf-8"?>
 <p:sld xmlns:a="http://schemas.openxmlformats.org/drawingml/2006/main" xmlns:p="http://schemas.openxmlformats.org/presentationml/2006/main" xmlns:r="http://schemas.openxmlformats.org/officeDocument/2006/relationships">
   <p:cSld>
     <p:bg>
@@ -5981,7 +6332,7 @@
                 </a:solidFill>
                 <a:latin typeface="Nunito Sans"/>
               </a:rPr>
-              <a:t>En la tarea 2-4-6, la regla era: tres números que van ______.  (sesión 44)</a:t>
+              <a:t>Pensar ______ es automático; pensar ______ cuesta esfuerzo.  (sesión 44)</a:t>
             </a:r>
           </a:p>
           <a:p>
@@ -6006,7 +6357,7 @@
                 </a:solidFill>
                 <a:latin typeface="Nunito Sans"/>
               </a:rPr>
-              <a:t>Rechazar una prueba ______ no es sesgo de confirmación; ignorar una buena, sí.  (sesión 44)</a:t>
+              <a:t>Un atajo mental no es lo mismo que un sesgo: casi siempre ______.  (sesión 44)</a:t>
             </a:r>
           </a:p>
           <a:p>
@@ -6031,7 +6382,7 @@
                 </a:solidFill>
                 <a:latin typeface="Nunito Sans"/>
               </a:rPr>
-              <a:t>Compartimos bulos porque nos ______ y porque lo manda alguien de confianza.  (sesión 33)</a:t>
+              <a:t>Palabras que suelen usar los titulares clickbait: «increíble», «brutal», «______».  (sesión 33)</a:t>
             </a:r>
           </a:p>
         </p:txBody>
@@ -6183,7 +6534,7 @@
                 </a:solidFill>
                 <a:latin typeface="Nunito Sans"/>
               </a:rPr>
-              <a:t>En la tarea 2-4-6, la regla era: tres números que van </a:t>
+              <a:t>Pensar </a:t>
             </a:r>
             <a:r>
               <a:rPr sz="2600" b="1">
@@ -6192,7 +6543,7 @@
                 </a:solidFill>
                 <a:latin typeface="Nunito Sans"/>
               </a:rPr>
-              <a:t>subiendo</a:t>
+              <a:t>rápido</a:t>
             </a:r>
             <a:r>
               <a:rPr sz="2600" b="0">
@@ -6201,6 +6552,67 @@
                 </a:solidFill>
                 <a:latin typeface="Nunito Sans"/>
               </a:rPr>
+              <a:t> es automático; pensar </a:t>
+            </a:r>
+            <a:r>
+              <a:rPr sz="2600" b="1">
+                <a:solidFill>
+                  <a:srgbClr val="1F2A44"/>
+                </a:solidFill>
+                <a:latin typeface="Nunito Sans"/>
+              </a:rPr>
+              <a:t>despacio</a:t>
+            </a:r>
+            <a:r>
+              <a:rPr sz="2600" b="0">
+                <a:solidFill>
+                  <a:srgbClr val="1F2A44"/>
+                </a:solidFill>
+                <a:latin typeface="Nunito Sans"/>
+              </a:rPr>
+              <a:t> cuesta esfuerzo.  (sesión 44)</a:t>
+            </a:r>
+          </a:p>
+          <a:p>
+            <a:pPr>
+              <a:spcAft>
+                <a:spcPts val="1170"/>
+              </a:spcAft>
+            </a:pPr>
+            <a:r>
+              <a:rPr sz="2600" b="1">
+                <a:solidFill>
+                  <a:srgbClr val="E8793A"/>
+                </a:solidFill>
+                <a:latin typeface="Nunito Sans"/>
+              </a:rPr>
+              <a:t>2. </a:t>
+            </a:r>
+            <a:r>
+              <a:rPr sz="2600" b="0">
+                <a:solidFill>
+                  <a:srgbClr val="1F2A44"/>
+                </a:solidFill>
+                <a:latin typeface="Nunito Sans"/>
+              </a:rPr>
+              <a:t>Un atajo mental no es lo mismo que un sesgo: casi siempre </a:t>
+            </a:r>
+            <a:r>
+              <a:rPr sz="2600" b="1">
+                <a:solidFill>
+                  <a:srgbClr val="1F2A44"/>
+                </a:solidFill>
+                <a:latin typeface="Nunito Sans"/>
+              </a:rPr>
+              <a:t>acierta</a:t>
+            </a:r>
+            <a:r>
+              <a:rPr sz="2600" b="0">
+                <a:solidFill>
+                  <a:srgbClr val="1F2A44"/>
+                </a:solidFill>
+                <a:latin typeface="Nunito Sans"/>
+              </a:rPr>
               <a:t>.  (sesión 44)</a:t>
             </a:r>
           </a:p>
@@ -6217,7 +6629,7 @@
                 </a:solidFill>
                 <a:latin typeface="Nunito Sans"/>
               </a:rPr>
-              <a:t>2. </a:t>
+              <a:t>3. </a:t>
             </a:r>
             <a:r>
               <a:rPr sz="2600" b="0">
@@ -6226,7 +6638,7 @@
                 </a:solidFill>
                 <a:latin typeface="Nunito Sans"/>
               </a:rPr>
-              <a:t>Rechazar una prueba </a:t>
+              <a:t>Palabras que suelen usar los titulares clickbait: «increíble», «brutal», «</a:t>
             </a:r>
             <a:r>
               <a:rPr sz="2600" b="1">
@@ -6235,7 +6647,7 @@
                 </a:solidFill>
                 <a:latin typeface="Nunito Sans"/>
               </a:rPr>
-              <a:t>mala</a:t>
+              <a:t>impactante</a:t>
             </a:r>
             <a:r>
               <a:rPr sz="2600" b="0">
@@ -6244,50 +6656,7 @@
                 </a:solidFill>
                 <a:latin typeface="Nunito Sans"/>
               </a:rPr>
-              <a:t> no es sesgo de confirmación; ignorar una buena, sí.  (sesión 44)</a:t>
-            </a:r>
-          </a:p>
-          <a:p>
-            <a:pPr>
-              <a:spcAft>
-                <a:spcPts val="1170"/>
-              </a:spcAft>
-            </a:pPr>
-            <a:r>
-              <a:rPr sz="2600" b="1">
-                <a:solidFill>
-                  <a:srgbClr val="E8793A"/>
-                </a:solidFill>
-                <a:latin typeface="Nunito Sans"/>
-              </a:rPr>
-              <a:t>3. </a:t>
-            </a:r>
-            <a:r>
-              <a:rPr sz="2600" b="0">
-                <a:solidFill>
-                  <a:srgbClr val="1F2A44"/>
-                </a:solidFill>
-                <a:latin typeface="Nunito Sans"/>
-              </a:rPr>
-              <a:t>Compartimos bulos porque nos </a:t>
-            </a:r>
-            <a:r>
-              <a:rPr sz="2600" b="1">
-                <a:solidFill>
-                  <a:srgbClr val="1F2A44"/>
-                </a:solidFill>
-                <a:latin typeface="Nunito Sans"/>
-              </a:rPr>
-              <a:t>emocionan</a:t>
-            </a:r>
-            <a:r>
-              <a:rPr sz="2600" b="0">
-                <a:solidFill>
-                  <a:srgbClr val="1F2A44"/>
-                </a:solidFill>
-                <a:latin typeface="Nunito Sans"/>
-              </a:rPr>
-              <a:t> y porque lo manda alguien de confianza.  (sesión 33)</a:t>
+              <a:t>».  (sesión 33)</a:t>
             </a:r>
           </a:p>
         </p:txBody>
@@ -6434,7 +6803,7 @@
                 </a:solidFill>
                 <a:latin typeface="Nunito Sans"/>
               </a:rPr>
-              <a:t>Dos candidatos a monitor del campamento: uno llega con ropa de marca y sonriendo; otro, serio y despeinado.</a:t>
+              <a:t>Un campesino pierde su hacha y sospecha del hijo del vecino. Desde entonces, el chico camina, habla y sonríe «como un ladrón».</a:t>
             </a:r>
           </a:p>
         </p:txBody>
@@ -6473,7 +6842,7 @@
                 </a:solidFill>
                 <a:latin typeface="Nunito Sans"/>
               </a:rPr>
-              <a:t>¿Cuál crees que será mejor monitor? ¿Por qué lo has pensado?</a:t>
+              <a:t>¿Ha cambiado el chico? ¿O ha cambiado otra cosa?</a:t>
             </a:r>
           </a:p>
         </p:txBody>
@@ -6577,7 +6946,7 @@
                 </a:solidFill>
                 <a:latin typeface="Fredoka"/>
               </a:rPr>
-              <a:t>Un rasgo lo tiñe todo</a:t>
+              <a:t>Ver solo lo que nos da la razón</a:t>
             </a:r>
           </a:p>
         </p:txBody>
@@ -6642,7 +7011,7 @@
                 </a:solidFill>
                 <a:latin typeface="Nunito Sans"/>
               </a:rPr>
-              <a:t>BLOQUE 1 · UN RASGO LO TIÑE TODO</a:t>
+              <a:t>BLOQUE 1 · VER SOLO LO QUE NOS DA LA RAZÓN</a:t>
             </a:r>
           </a:p>
         </p:txBody>
@@ -6681,7 +7050,7 @@
                 </a:solidFill>
                 <a:latin typeface="Fredoka"/>
               </a:rPr>
-              <a:t>Efecto halo</a:t>
+              <a:t>Sesgo de confirmación</a:t>
             </a:r>
           </a:p>
         </p:txBody>
@@ -6763,7 +7132,7 @@
                 </a:solidFill>
                 <a:latin typeface="Nunito Sans"/>
               </a:rPr>
-              <a:t>Es dejar que un rasgo que nos gusta (o que no nos gusta) tiña todo lo que pensamos de alguien.</a:t>
+              <a:t>Es la tendencia a fijarnos solo en lo que confirma lo que ya creemos.</a:t>
             </a:r>
           </a:p>
         </p:txBody>
@@ -6811,7 +7180,7 @@
                 </a:solidFill>
                 <a:latin typeface="Nunito Sans"/>
               </a:rPr>
-              <a:t>Halo:</a:t>
+              <a:t>Confirmar:</a:t>
             </a:r>
             <a:r>
               <a:rPr sz="2800" b="0">
@@ -6820,7 +7189,7 @@
                 </a:solidFill>
                 <a:latin typeface="Nunito Sans"/>
               </a:rPr>
-              <a:t> el círculo de luz de los santos en los cuadros</a:t>
+              <a:t> dar por bueno, apoyar</a:t>
             </a:r>
           </a:p>
           <a:p>
@@ -6839,13 +7208,22 @@
               <a:t>• </a:t>
             </a:r>
             <a:r>
+              <a:rPr sz="2800" b="1">
+                <a:solidFill>
+                  <a:srgbClr val="1F2A44"/>
+                </a:solidFill>
+                <a:latin typeface="Nunito Sans"/>
+              </a:rPr>
+              <a:t>Buscamos</a:t>
+            </a:r>
+            <a:r>
               <a:rPr sz="2800" b="0">
                 <a:solidFill>
                   <a:srgbClr val="1F2A44"/>
                 </a:solidFill>
                 <a:latin typeface="Nunito Sans"/>
               </a:rPr>
-              <a:t>Un rasgo bueno lo ilumina todo: «es guapo, será listo»</a:t>
+              <a:t> lo que nos da la razón</a:t>
             </a:r>
           </a:p>
           <a:p>
@@ -6864,13 +7242,22 @@
               <a:t>• </a:t>
             </a:r>
             <a:r>
+              <a:rPr sz="2800" b="1">
+                <a:solidFill>
+                  <a:srgbClr val="1F2A44"/>
+                </a:solidFill>
+                <a:latin typeface="Nunito Sans"/>
+              </a:rPr>
+              <a:t>Recordamos</a:t>
+            </a:r>
+            <a:r>
               <a:rPr sz="2800" b="0">
                 <a:solidFill>
                   <a:srgbClr val="1F2A44"/>
                 </a:solidFill>
                 <a:latin typeface="Nunito Sans"/>
               </a:rPr>
-              <a:t>Al revés también: un rasgo malo lo oscurece todo</a:t>
+              <a:t> mejor lo que nos da la razón</a:t>
             </a:r>
           </a:p>
           <a:p>
@@ -6889,13 +7276,22 @@
               <a:t>• </a:t>
             </a:r>
             <a:r>
+              <a:rPr sz="2800" b="1">
+                <a:solidFill>
+                  <a:srgbClr val="1F2A44"/>
+                </a:solidFill>
+                <a:latin typeface="Nunito Sans"/>
+              </a:rPr>
+              <a:t>Interpretamos</a:t>
+            </a:r>
+            <a:r>
               <a:rPr sz="2800" b="0">
                 <a:solidFill>
                   <a:srgbClr val="1F2A44"/>
                 </a:solidFill>
                 <a:latin typeface="Nunito Sans"/>
               </a:rPr>
-              <a:t>Lo describió el psicólogo Edward Thorndike en 1920</a:t>
+              <a:t> los datos dudosos a nuestro favor</a:t>
             </a:r>
           </a:p>
         </p:txBody>
@@ -6960,7 +7356,7 @@
                 </a:solidFill>
                 <a:latin typeface="Nunito Sans"/>
               </a:rPr>
-              <a:t>BLOQUE 1 · UN RASGO LO TIÑE TODO</a:t>
+              <a:t>BLOQUE 1 · VER SOLO LO QUE NOS DA LA RAZÓN</a:t>
             </a:r>
           </a:p>
         </p:txBody>
@@ -6999,173 +7395,221 @@
                 </a:solidFill>
                 <a:latin typeface="Fredoka"/>
               </a:rPr>
-              <a:t>Primeras impresiones</a:t>
-            </a:r>
-          </a:p>
-        </p:txBody>
-      </p:sp>
-      <p:sp>
-        <p:nvSpPr>
-          <p:cNvPr id="4" name="TextBox 3"/>
-          <p:cNvSpPr txBox="1"/>
+              <a:t>Tres formas de confirmar</a:t>
+            </a:r>
+          </a:p>
+        </p:txBody>
+      </p:sp>
+      <p:graphicFrame>
+        <p:nvGraphicFramePr>
+          <p:cNvPr id="4" name="Table 3"/>
+          <p:cNvGraphicFramePr>
+            <a:graphicFrameLocks noGrp="1"/>
+          </p:cNvGraphicFramePr>
           <p:nvPr/>
-        </p:nvSpPr>
-        <p:spPr>
-          <a:xfrm>
-            <a:off x="840000" y="1730000"/>
-            <a:ext cx="10512000" cy="1000000"/>
-          </a:xfrm>
-          <a:prstGeom prst="rect">
-            <a:avLst/>
-          </a:prstGeom>
-          <a:noFill/>
-        </p:spPr>
-        <p:txBody>
-          <a:bodyPr wrap="square" anchor="ctr">
-            <a:spAutoFit/>
-          </a:bodyPr>
-          <a:lstStyle/>
-          <a:p>
-            <a:pPr>
-              <a:spcAft>
-                <a:spcPts val="1080"/>
-              </a:spcAft>
-            </a:pPr>
-            <a:r>
-              <a:rPr sz="2400" b="0">
-                <a:solidFill>
-                  <a:srgbClr val="1F2A44"/>
-                </a:solidFill>
-                <a:latin typeface="Nunito Sans"/>
-              </a:rPr>
-              <a:t>Nos hacemos una idea de alguien en muy poco tiempo.</a:t>
-            </a:r>
-          </a:p>
-        </p:txBody>
-      </p:sp>
-      <p:sp>
-        <p:nvSpPr>
-          <p:cNvPr id="5" name="TextBox 4"/>
-          <p:cNvSpPr txBox="1"/>
-          <p:nvPr/>
-        </p:nvSpPr>
-        <p:spPr>
-          <a:xfrm>
-            <a:off x="640000" y="3000000"/>
-            <a:ext cx="10912000" cy="3458000"/>
-          </a:xfrm>
-          <a:prstGeom prst="rect">
-            <a:avLst/>
-          </a:prstGeom>
-          <a:noFill/>
-        </p:spPr>
-        <p:txBody>
-          <a:bodyPr wrap="square">
-            <a:spAutoFit/>
-          </a:bodyPr>
-          <a:lstStyle/>
-          <a:p>
-            <a:pPr>
-              <a:spcAft>
-                <a:spcPts val="1260"/>
-              </a:spcAft>
-            </a:pPr>
-            <a:r>
-              <a:rPr sz="2800" b="1">
-                <a:solidFill>
-                  <a:srgbClr val="E8793A"/>
-                </a:solidFill>
-                <a:latin typeface="Nunito Sans"/>
-              </a:rPr>
-              <a:t>• </a:t>
-            </a:r>
-            <a:r>
-              <a:rPr sz="2800" b="0">
-                <a:solidFill>
-                  <a:srgbClr val="1F2A44"/>
-                </a:solidFill>
-                <a:latin typeface="Nunito Sans"/>
-              </a:rPr>
-              <a:t>Basta ver una cara un instante para juzgar si parece de fiar</a:t>
-            </a:r>
-          </a:p>
-          <a:p>
-            <a:pPr>
-              <a:spcAft>
-                <a:spcPts val="1260"/>
-              </a:spcAft>
-            </a:pPr>
-            <a:r>
-              <a:rPr sz="2800" b="1">
-                <a:solidFill>
-                  <a:srgbClr val="E8793A"/>
-                </a:solidFill>
-                <a:latin typeface="Nunito Sans"/>
-              </a:rPr>
-              <a:t>• </a:t>
-            </a:r>
-            <a:r>
-              <a:rPr sz="2800" b="0">
-                <a:solidFill>
-                  <a:srgbClr val="1F2A44"/>
-                </a:solidFill>
-                <a:latin typeface="Nunito Sans"/>
-              </a:rPr>
-              <a:t>Esa primera idea suele costar cambiarla</a:t>
-            </a:r>
-          </a:p>
-          <a:p>
-            <a:pPr>
-              <a:spcAft>
-                <a:spcPts val="1260"/>
-              </a:spcAft>
-            </a:pPr>
-            <a:r>
-              <a:rPr sz="2800" b="1">
-                <a:solidFill>
-                  <a:srgbClr val="E8793A"/>
-                </a:solidFill>
-                <a:latin typeface="Nunito Sans"/>
-              </a:rPr>
-              <a:t>• </a:t>
-            </a:r>
-            <a:r>
-              <a:rPr sz="2800" b="0">
-                <a:solidFill>
-                  <a:srgbClr val="1F2A44"/>
-                </a:solidFill>
-                <a:latin typeface="Nunito Sans"/>
-              </a:rPr>
-              <a:t>Luego buscamos pruebas que la confirmen (sesión 44)</a:t>
-            </a:r>
-          </a:p>
-          <a:p>
-            <a:pPr>
-              <a:spcAft>
-                <a:spcPts val="1260"/>
-              </a:spcAft>
-            </a:pPr>
-            <a:r>
-              <a:rPr sz="2800" b="1">
-                <a:solidFill>
-                  <a:srgbClr val="E8793A"/>
-                </a:solidFill>
-                <a:latin typeface="Nunito Sans"/>
-              </a:rPr>
-              <a:t>• </a:t>
-            </a:r>
-            <a:r>
-              <a:rPr sz="2800" b="0">
-                <a:solidFill>
-                  <a:srgbClr val="1F2A44"/>
-                </a:solidFill>
-                <a:latin typeface="Nunito Sans"/>
-              </a:rPr>
-              <a:t>Pero una cara o una ropa dicen muy poco de cómo es alguien</a:t>
-            </a:r>
-          </a:p>
-        </p:txBody>
-      </p:sp>
+        </p:nvGraphicFramePr>
+        <p:xfrm>
+          <a:off x="640000" y="1700000"/>
+          <a:ext cx="10912000" cy="2400000"/>
+        </p:xfrm>
+        <a:graphic>
+          <a:graphicData uri="http://schemas.openxmlformats.org/drawingml/2006/table">
+            <a:tbl>
+              <a:tblPr firstRow="1" bandRow="1">
+                <a:tableStyleId>{5C22544A-7EE6-4342-B048-85BDC9FD1C3A}</a:tableStyleId>
+              </a:tblPr>
+              <a:tblGrid>
+                <a:gridCol w="5456000"/>
+                <a:gridCol w="5456000"/>
+              </a:tblGrid>
+              <a:tr h="600000">
+                <a:tc>
+                  <a:txBody>
+                    <a:bodyPr/>
+                    <a:lstStyle/>
+                    <a:p>
+                      <a:r>
+                        <a:rPr sz="2000" b="1">
+                          <a:solidFill>
+                            <a:srgbClr val="FBF7EF"/>
+                          </a:solidFill>
+                          <a:latin typeface="Fredoka"/>
+                        </a:rPr>
+                        <a:t>Forma</a:t>
+                      </a:r>
+                    </a:p>
+                  </a:txBody>
+                  <a:tcPr>
+                    <a:solidFill>
+                      <a:srgbClr val="1F2A44"/>
+                    </a:solidFill>
+                  </a:tcPr>
+                </a:tc>
+                <a:tc>
+                  <a:txBody>
+                    <a:bodyPr/>
+                    <a:lstStyle/>
+                    <a:p>
+                      <a:r>
+                        <a:rPr sz="2000" b="1">
+                          <a:solidFill>
+                            <a:srgbClr val="FBF7EF"/>
+                          </a:solidFill>
+                          <a:latin typeface="Fredoka"/>
+                        </a:rPr>
+                        <a:t>Ejemplo</a:t>
+                      </a:r>
+                    </a:p>
+                  </a:txBody>
+                  <a:tcPr>
+                    <a:solidFill>
+                      <a:srgbClr val="1F2A44"/>
+                    </a:solidFill>
+                  </a:tcPr>
+                </a:tc>
+              </a:tr>
+              <a:tr h="600000">
+                <a:tc>
+                  <a:txBody>
+                    <a:bodyPr/>
+                    <a:lstStyle/>
+                    <a:p>
+                      <a:r>
+                        <a:rPr sz="2000" b="0">
+                          <a:solidFill>
+                            <a:srgbClr val="1F2A44"/>
+                          </a:solidFill>
+                          <a:latin typeface="Nunito Sans"/>
+                        </a:rPr>
+                        <a:t>Buscar</a:t>
+                      </a:r>
+                    </a:p>
+                  </a:txBody>
+                  <a:tcPr>
+                    <a:solidFill>
+                      <a:srgbClr val="FFFFFF"/>
+                    </a:solidFill>
+                  </a:tcPr>
+                </a:tc>
+                <a:tc>
+                  <a:txBody>
+                    <a:bodyPr/>
+                    <a:lstStyle/>
+                    <a:p>
+                      <a:r>
+                        <a:rPr sz="2000" b="0">
+                          <a:solidFill>
+                            <a:srgbClr val="1F2A44"/>
+                          </a:solidFill>
+                          <a:latin typeface="Nunito Sans"/>
+                        </a:rPr>
+                        <a:t>Solo veo vídeos que dicen que mi equipo es el mejor</a:t>
+                      </a:r>
+                    </a:p>
+                  </a:txBody>
+                  <a:tcPr>
+                    <a:solidFill>
+                      <a:srgbClr val="FFFFFF"/>
+                    </a:solidFill>
+                  </a:tcPr>
+                </a:tc>
+              </a:tr>
+              <a:tr h="600000">
+                <a:tc>
+                  <a:txBody>
+                    <a:bodyPr/>
+                    <a:lstStyle/>
+                    <a:p>
+                      <a:r>
+                        <a:rPr sz="2000" b="0">
+                          <a:solidFill>
+                            <a:srgbClr val="1F2A44"/>
+                          </a:solidFill>
+                          <a:latin typeface="Nunito Sans"/>
+                        </a:rPr>
+                        <a:t>Recordar</a:t>
+                      </a:r>
+                    </a:p>
+                  </a:txBody>
+                  <a:tcPr>
+                    <a:solidFill>
+                      <a:srgbClr val="EAF0F7"/>
+                    </a:solidFill>
+                  </a:tcPr>
+                </a:tc>
+                <a:tc>
+                  <a:txBody>
+                    <a:bodyPr/>
+                    <a:lstStyle/>
+                    <a:p>
+                      <a:r>
+                        <a:rPr sz="2000" b="0">
+                          <a:solidFill>
+                            <a:srgbClr val="1F2A44"/>
+                          </a:solidFill>
+                          <a:latin typeface="Nunito Sans"/>
+                        </a:rPr>
+                        <a:t>Me acuerdo del día que el horóscopo acertó</a:t>
+                      </a:r>
+                    </a:p>
+                  </a:txBody>
+                  <a:tcPr>
+                    <a:solidFill>
+                      <a:srgbClr val="EAF0F7"/>
+                    </a:solidFill>
+                  </a:tcPr>
+                </a:tc>
+              </a:tr>
+              <a:tr h="600000">
+                <a:tc>
+                  <a:txBody>
+                    <a:bodyPr/>
+                    <a:lstStyle/>
+                    <a:p>
+                      <a:r>
+                        <a:rPr sz="2000" b="0">
+                          <a:solidFill>
+                            <a:srgbClr val="1F2A44"/>
+                          </a:solidFill>
+                          <a:latin typeface="Nunito Sans"/>
+                        </a:rPr>
+                        <a:t>Interpretar</a:t>
+                      </a:r>
+                    </a:p>
+                  </a:txBody>
+                  <a:tcPr>
+                    <a:solidFill>
+                      <a:srgbClr val="FFFFFF"/>
+                    </a:solidFill>
+                  </a:tcPr>
+                </a:tc>
+                <a:tc>
+                  <a:txBody>
+                    <a:bodyPr/>
+                    <a:lstStyle/>
+                    <a:p>
+                      <a:r>
+                        <a:rPr sz="2000" b="0">
+                          <a:solidFill>
+                            <a:srgbClr val="1F2A44"/>
+                          </a:solidFill>
+                          <a:latin typeface="Nunito Sans"/>
+                        </a:rPr>
+                        <a:t>Falta contra el Athletic: «¡robo!». A favor: «era clarísima»</a:t>
+                      </a:r>
+                    </a:p>
+                  </a:txBody>
+                  <a:tcPr>
+                    <a:solidFill>
+                      <a:srgbClr val="FFFFFF"/>
+                    </a:solidFill>
+                  </a:tcPr>
+                </a:tc>
+              </a:tr>
+            </a:tbl>
+          </a:graphicData>
+        </a:graphic>
+      </p:graphicFrame>
     </p:spTree>
   </p:cSld>
   <p:clrMapOvr>
@@ -7226,7 +7670,7 @@
                 </a:solidFill>
                 <a:latin typeface="Nunito Sans"/>
               </a:rPr>
-              <a:t>BLOQUE 1 · UN RASGO LO TIÑE TODO</a:t>
+              <a:t>BLOQUE 1 · VER SOLO LO QUE NOS DA LA RAZÓN</a:t>
             </a:r>
           </a:p>
         </p:txBody>
@@ -7239,8 +7683,8 @@
         </p:nvSpPr>
         <p:spPr>
           <a:xfrm>
-            <a:off x="640000" y="760000"/>
-            <a:ext cx="10912000" cy="800000"/>
+            <a:off x="640000" y="1500000"/>
+            <a:ext cx="10912000" cy="3000000"/>
           </a:xfrm>
           <a:prstGeom prst="rect">
             <a:avLst/>
@@ -7255,388 +7699,60 @@
           <a:p>
             <a:pPr>
               <a:spcAft>
-                <a:spcPts val="1710"/>
-              </a:spcAft>
-            </a:pPr>
-            <a:r>
-              <a:rPr sz="3800" b="1">
+                <a:spcPts val="1530"/>
+              </a:spcAft>
+            </a:pPr>
+            <a:r>
+              <a:rPr sz="3400" b="1">
                 <a:solidFill>
                   <a:srgbClr val="1F2A44"/>
                 </a:solidFill>
-                <a:latin typeface="Fredoka"/>
-              </a:rPr>
-              <a:t>Dónde aparece el halo</a:t>
-            </a:r>
-          </a:p>
-        </p:txBody>
-      </p:sp>
-      <p:graphicFrame>
-        <p:nvGraphicFramePr>
-          <p:cNvPr id="4" name="Table 3"/>
-          <p:cNvGraphicFramePr>
-            <a:graphicFrameLocks noGrp="1"/>
-          </p:cNvGraphicFramePr>
+                <a:latin typeface="Nunito Sans"/>
+              </a:rPr>
+              <a:t>El entendimiento humano, cuando ha adoptado una opinión, atrae todo lo demás para apoyarla y hacerla concordar con ella.</a:t>
+            </a:r>
+          </a:p>
+        </p:txBody>
+      </p:sp>
+      <p:sp>
+        <p:nvSpPr>
+          <p:cNvPr id="4" name="TextBox 3"/>
+          <p:cNvSpPr txBox="1"/>
           <p:nvPr/>
-        </p:nvGraphicFramePr>
-        <p:xfrm>
-          <a:off x="640000" y="1700000"/>
-          <a:ext cx="10912000" cy="3000000"/>
-        </p:xfrm>
-        <a:graphic>
-          <a:graphicData uri="http://schemas.openxmlformats.org/drawingml/2006/table">
-            <a:tbl>
-              <a:tblPr firstRow="1" bandRow="1">
-                <a:tableStyleId>{5C22544A-7EE6-4342-B048-85BDC9FD1C3A}</a:tableStyleId>
-              </a:tblPr>
-              <a:tblGrid>
-                <a:gridCol w="3637333"/>
-                <a:gridCol w="3637333"/>
-                <a:gridCol w="3637334"/>
-              </a:tblGrid>
-              <a:tr h="600000">
-                <a:tc>
-                  <a:txBody>
-                    <a:bodyPr/>
-                    <a:lstStyle/>
-                    <a:p>
-                      <a:r>
-                        <a:rPr sz="2000" b="1">
-                          <a:solidFill>
-                            <a:srgbClr val="FBF7EF"/>
-                          </a:solidFill>
-                          <a:latin typeface="Fredoka"/>
-                        </a:rPr>
-                        <a:t>Situación</a:t>
-                      </a:r>
-                    </a:p>
-                  </a:txBody>
-                  <a:tcPr>
-                    <a:solidFill>
-                      <a:srgbClr val="1F2A44"/>
-                    </a:solidFill>
-                  </a:tcPr>
-                </a:tc>
-                <a:tc>
-                  <a:txBody>
-                    <a:bodyPr/>
-                    <a:lstStyle/>
-                    <a:p>
-                      <a:r>
-                        <a:rPr sz="2000" b="1">
-                          <a:solidFill>
-                            <a:srgbClr val="FBF7EF"/>
-                          </a:solidFill>
-                          <a:latin typeface="Fredoka"/>
-                        </a:rPr>
-                        <a:t>El rasgo</a:t>
-                      </a:r>
-                    </a:p>
-                  </a:txBody>
-                  <a:tcPr>
-                    <a:solidFill>
-                      <a:srgbClr val="1F2A44"/>
-                    </a:solidFill>
-                  </a:tcPr>
-                </a:tc>
-                <a:tc>
-                  <a:txBody>
-                    <a:bodyPr/>
-                    <a:lstStyle/>
-                    <a:p>
-                      <a:r>
-                        <a:rPr sz="2000" b="1">
-                          <a:solidFill>
-                            <a:srgbClr val="FBF7EF"/>
-                          </a:solidFill>
-                          <a:latin typeface="Fredoka"/>
-                        </a:rPr>
-                        <a:t>Lo que se deduce sin pruebas</a:t>
-                      </a:r>
-                    </a:p>
-                  </a:txBody>
-                  <a:tcPr>
-                    <a:solidFill>
-                      <a:srgbClr val="1F2A44"/>
-                    </a:solidFill>
-                  </a:tcPr>
-                </a:tc>
-              </a:tr>
-              <a:tr h="600000">
-                <a:tc>
-                  <a:txBody>
-                    <a:bodyPr/>
-                    <a:lstStyle/>
-                    <a:p>
-                      <a:r>
-                        <a:rPr sz="2000" b="0">
-                          <a:solidFill>
-                            <a:srgbClr val="1F2A44"/>
-                          </a:solidFill>
-                          <a:latin typeface="Nunito Sans"/>
-                        </a:rPr>
-                        <a:t>Anuncio</a:t>
-                      </a:r>
-                    </a:p>
-                  </a:txBody>
-                  <a:tcPr>
-                    <a:solidFill>
-                      <a:srgbClr val="FFFFFF"/>
-                    </a:solidFill>
-                  </a:tcPr>
-                </a:tc>
-                <a:tc>
-                  <a:txBody>
-                    <a:bodyPr/>
-                    <a:lstStyle/>
-                    <a:p>
-                      <a:r>
-                        <a:rPr sz="2000" b="0">
-                          <a:solidFill>
-                            <a:srgbClr val="1F2A44"/>
-                          </a:solidFill>
-                          <a:latin typeface="Nunito Sans"/>
-                        </a:rPr>
-                        <a:t>Un futbolista famoso</a:t>
-                      </a:r>
-                    </a:p>
-                  </a:txBody>
-                  <a:tcPr>
-                    <a:solidFill>
-                      <a:srgbClr val="FFFFFF"/>
-                    </a:solidFill>
-                  </a:tcPr>
-                </a:tc>
-                <a:tc>
-                  <a:txBody>
-                    <a:bodyPr/>
-                    <a:lstStyle/>
-                    <a:p>
-                      <a:r>
-                        <a:rPr sz="2000" b="0">
-                          <a:solidFill>
-                            <a:srgbClr val="1F2A44"/>
-                          </a:solidFill>
-                          <a:latin typeface="Nunito Sans"/>
-                        </a:rPr>
-                        <a:t>«El producto es bueno»</a:t>
-                      </a:r>
-                    </a:p>
-                  </a:txBody>
-                  <a:tcPr>
-                    <a:solidFill>
-                      <a:srgbClr val="FFFFFF"/>
-                    </a:solidFill>
-                  </a:tcPr>
-                </a:tc>
-              </a:tr>
-              <a:tr h="600000">
-                <a:tc>
-                  <a:txBody>
-                    <a:bodyPr/>
-                    <a:lstStyle/>
-                    <a:p>
-                      <a:r>
-                        <a:rPr sz="2000" b="0">
-                          <a:solidFill>
-                            <a:srgbClr val="1F2A44"/>
-                          </a:solidFill>
-                          <a:latin typeface="Nunito Sans"/>
-                        </a:rPr>
-                        <a:t>Examen</a:t>
-                      </a:r>
-                    </a:p>
-                  </a:txBody>
-                  <a:tcPr>
-                    <a:solidFill>
-                      <a:srgbClr val="EAF0F7"/>
-                    </a:solidFill>
-                  </a:tcPr>
-                </a:tc>
-                <a:tc>
-                  <a:txBody>
-                    <a:bodyPr/>
-                    <a:lstStyle/>
-                    <a:p>
-                      <a:r>
-                        <a:rPr sz="2000" b="0">
-                          <a:solidFill>
-                            <a:srgbClr val="1F2A44"/>
-                          </a:solidFill>
-                          <a:latin typeface="Nunito Sans"/>
-                        </a:rPr>
-                        <a:t>Letra bonita y limpia</a:t>
-                      </a:r>
-                    </a:p>
-                  </a:txBody>
-                  <a:tcPr>
-                    <a:solidFill>
-                      <a:srgbClr val="EAF0F7"/>
-                    </a:solidFill>
-                  </a:tcPr>
-                </a:tc>
-                <a:tc>
-                  <a:txBody>
-                    <a:bodyPr/>
-                    <a:lstStyle/>
-                    <a:p>
-                      <a:r>
-                        <a:rPr sz="2000" b="0">
-                          <a:solidFill>
-                            <a:srgbClr val="1F2A44"/>
-                          </a:solidFill>
-                          <a:latin typeface="Nunito Sans"/>
-                        </a:rPr>
-                        <a:t>«Las respuestas están mejor»</a:t>
-                      </a:r>
-                    </a:p>
-                  </a:txBody>
-                  <a:tcPr>
-                    <a:solidFill>
-                      <a:srgbClr val="EAF0F7"/>
-                    </a:solidFill>
-                  </a:tcPr>
-                </a:tc>
-              </a:tr>
-              <a:tr h="600000">
-                <a:tc>
-                  <a:txBody>
-                    <a:bodyPr/>
-                    <a:lstStyle/>
-                    <a:p>
-                      <a:r>
-                        <a:rPr sz="2000" b="0">
-                          <a:solidFill>
-                            <a:srgbClr val="1F2A44"/>
-                          </a:solidFill>
-                          <a:latin typeface="Nunito Sans"/>
-                        </a:rPr>
-                        <a:t>Redes</a:t>
-                      </a:r>
-                    </a:p>
-                  </a:txBody>
-                  <a:tcPr>
-                    <a:solidFill>
-                      <a:srgbClr val="FFFFFF"/>
-                    </a:solidFill>
-                  </a:tcPr>
-                </a:tc>
-                <a:tc>
-                  <a:txBody>
-                    <a:bodyPr/>
-                    <a:lstStyle/>
-                    <a:p>
-                      <a:r>
-                        <a:rPr sz="2000" b="0">
-                          <a:solidFill>
-                            <a:srgbClr val="1F2A44"/>
-                          </a:solidFill>
-                          <a:latin typeface="Nunito Sans"/>
-                        </a:rPr>
-                        <a:t>Muchos seguidores</a:t>
-                      </a:r>
-                    </a:p>
-                  </a:txBody>
-                  <a:tcPr>
-                    <a:solidFill>
-                      <a:srgbClr val="FFFFFF"/>
-                    </a:solidFill>
-                  </a:tcPr>
-                </a:tc>
-                <a:tc>
-                  <a:txBody>
-                    <a:bodyPr/>
-                    <a:lstStyle/>
-                    <a:p>
-                      <a:r>
-                        <a:rPr sz="2000" b="0">
-                          <a:solidFill>
-                            <a:srgbClr val="1F2A44"/>
-                          </a:solidFill>
-                          <a:latin typeface="Nunito Sans"/>
-                        </a:rPr>
-                        <a:t>«Sabe de lo que habla»</a:t>
-                      </a:r>
-                    </a:p>
-                  </a:txBody>
-                  <a:tcPr>
-                    <a:solidFill>
-                      <a:srgbClr val="FFFFFF"/>
-                    </a:solidFill>
-                  </a:tcPr>
-                </a:tc>
-              </a:tr>
-              <a:tr h="600000">
-                <a:tc>
-                  <a:txBody>
-                    <a:bodyPr/>
-                    <a:lstStyle/>
-                    <a:p>
-                      <a:r>
-                        <a:rPr sz="2000" b="0">
-                          <a:solidFill>
-                            <a:srgbClr val="1F2A44"/>
-                          </a:solidFill>
-                          <a:latin typeface="Nunito Sans"/>
-                        </a:rPr>
-                        <a:t>Entrevista de trabajo</a:t>
-                      </a:r>
-                    </a:p>
-                  </a:txBody>
-                  <a:tcPr>
-                    <a:solidFill>
-                      <a:srgbClr val="EAF0F7"/>
-                    </a:solidFill>
-                  </a:tcPr>
-                </a:tc>
-                <a:tc>
-                  <a:txBody>
-                    <a:bodyPr/>
-                    <a:lstStyle/>
-                    <a:p>
-                      <a:r>
-                        <a:rPr sz="2000" b="0">
-                          <a:solidFill>
-                            <a:srgbClr val="1F2A44"/>
-                          </a:solidFill>
-                          <a:latin typeface="Nunito Sans"/>
-                        </a:rPr>
-                        <a:t>Ropa elegante</a:t>
-                      </a:r>
-                    </a:p>
-                  </a:txBody>
-                  <a:tcPr>
-                    <a:solidFill>
-                      <a:srgbClr val="EAF0F7"/>
-                    </a:solidFill>
-                  </a:tcPr>
-                </a:tc>
-                <a:tc>
-                  <a:txBody>
-                    <a:bodyPr/>
-                    <a:lstStyle/>
-                    <a:p>
-                      <a:r>
-                        <a:rPr sz="2000" b="0">
-                          <a:solidFill>
-                            <a:srgbClr val="1F2A44"/>
-                          </a:solidFill>
-                          <a:latin typeface="Nunito Sans"/>
-                        </a:rPr>
-                        <a:t>«Será buen trabajador»</a:t>
-                      </a:r>
-                    </a:p>
-                  </a:txBody>
-                  <a:tcPr>
-                    <a:solidFill>
-                      <a:srgbClr val="EAF0F7"/>
-                    </a:solidFill>
-                  </a:tcPr>
-                </a:tc>
-              </a:tr>
-            </a:tbl>
-          </a:graphicData>
-        </a:graphic>
-      </p:graphicFrame>
+        </p:nvSpPr>
+        <p:spPr>
+          <a:xfrm>
+            <a:off x="640000" y="4700000"/>
+            <a:ext cx="10912000" cy="600000"/>
+          </a:xfrm>
+          <a:prstGeom prst="rect">
+            <a:avLst/>
+          </a:prstGeom>
+          <a:noFill/>
+        </p:spPr>
+        <p:txBody>
+          <a:bodyPr wrap="square">
+            <a:spAutoFit/>
+          </a:bodyPr>
+          <a:lstStyle/>
+          <a:p>
+            <a:pPr>
+              <a:spcAft>
+                <a:spcPts val="990"/>
+              </a:spcAft>
+            </a:pPr>
+            <a:r>
+              <a:rPr sz="2200" b="0">
+                <a:solidFill>
+                  <a:srgbClr val="4A5568"/>
+                </a:solidFill>
+                <a:latin typeface="Nunito Sans"/>
+              </a:rPr>
+              <a:t>Francis Bacon, Novum Organum (1620)</a:t>
+            </a:r>
+          </a:p>
+        </p:txBody>
+      </p:sp>
     </p:spTree>
   </p:cSld>
   <p:clrMapOvr>
